--- a/docs/Tour-Reservation-Spring-Boot.pptx
+++ b/docs/Tour-Reservation-Spring-Boot.pptx
@@ -9376,7 +9376,7 @@
         </p:nvSpPr>
         <p:spPr>
           <a:xfrm>
-            <a:off x="5852175" y="658050"/>
+            <a:off x="6620775" y="1258550"/>
             <a:ext cx="2702400" cy="1607700"/>
           </a:xfrm>
           <a:prstGeom prst="rect">
@@ -9385,7 +9385,7 @@
         </p:spPr>
         <p:txBody>
           <a:bodyPr anchorCtr="0" anchor="t" bIns="91425" lIns="91425" spcFirstLastPara="1" rIns="91425" wrap="square" tIns="91425">
-            <a:normAutofit fontScale="90000"/>
+            <a:noAutofit/>
           </a:bodyPr>
           <a:lstStyle/>
           <a:p>
@@ -9396,10 +9396,11 @@
               <a:spcAft>
                 <a:spcPts val="0"/>
               </a:spcAft>
+              <a:buSzPts val="990"/>
               <a:buNone/>
             </a:pPr>
             <a:r>
-              <a:rPr b="1" lang="bg" sz="2800">
+              <a:rPr b="1" lang="bg" sz="2320">
                 <a:latin typeface="Comfortaa"/>
                 <a:ea typeface="Comfortaa"/>
                 <a:cs typeface="Comfortaa"/>
@@ -9407,7 +9408,7 @@
               </a:rPr>
               <a:t>Архитектура на базата данни</a:t>
             </a:r>
-            <a:endParaRPr b="1" sz="2800">
+            <a:endParaRPr b="1" sz="2320">
               <a:latin typeface="Comfortaa"/>
               <a:ea typeface="Comfortaa"/>
               <a:cs typeface="Comfortaa"/>
@@ -9422,12 +9423,13 @@
               <a:spcAft>
                 <a:spcPts val="0"/>
               </a:spcAft>
+              <a:buSzPts val="990"/>
               <a:buNone/>
             </a:pPr>
             <a:r>
               <a:t/>
             </a:r>
-            <a:endParaRPr b="1" sz="2800">
+            <a:endParaRPr b="1" sz="2520">
               <a:latin typeface="Comfortaa"/>
               <a:ea typeface="Comfortaa"/>
               <a:cs typeface="Comfortaa"/>
@@ -9452,8 +9454,8 @@
         </p:blipFill>
         <p:spPr>
           <a:xfrm>
-            <a:off x="173425" y="235475"/>
-            <a:ext cx="5415049" cy="4461776"/>
+            <a:off x="248050" y="333775"/>
+            <a:ext cx="6255226" cy="4097551"/>
           </a:xfrm>
           <a:prstGeom prst="rect">
             <a:avLst/>

--- a/docs/Tour-Reservation-Spring-Boot.pptx
+++ b/docs/Tour-Reservation-Spring-Boot.pptx
@@ -18,31 +18,32 @@
     <p:sldId id="263" r:id="rId13"/>
     <p:sldId id="264" r:id="rId14"/>
     <p:sldId id="265" r:id="rId15"/>
+    <p:sldId id="266" r:id="rId16"/>
   </p:sldIdLst>
   <p:sldSz cy="5143500" cx="9144000"/>
   <p:notesSz cx="6858000" cy="9144000"/>
   <p:embeddedFontLst>
     <p:embeddedFont>
       <p:font typeface="Comfortaa SemiBold"/>
-      <p:regular r:id="rId16"/>
-      <p:bold r:id="rId17"/>
+      <p:regular r:id="rId17"/>
+      <p:bold r:id="rId18"/>
     </p:embeddedFont>
     <p:embeddedFont>
       <p:font typeface="Roboto"/>
-      <p:regular r:id="rId18"/>
-      <p:bold r:id="rId19"/>
-      <p:italic r:id="rId20"/>
-      <p:boldItalic r:id="rId21"/>
+      <p:regular r:id="rId19"/>
+      <p:bold r:id="rId20"/>
+      <p:italic r:id="rId21"/>
+      <p:boldItalic r:id="rId22"/>
     </p:embeddedFont>
     <p:embeddedFont>
       <p:font typeface="Comfortaa Medium"/>
-      <p:regular r:id="rId22"/>
-      <p:bold r:id="rId23"/>
+      <p:regular r:id="rId23"/>
+      <p:bold r:id="rId24"/>
     </p:embeddedFont>
     <p:embeddedFont>
       <p:font typeface="Comfortaa"/>
-      <p:regular r:id="rId24"/>
-      <p:bold r:id="rId25"/>
+      <p:regular r:id="rId25"/>
+      <p:bold r:id="rId26"/>
     </p:embeddedFont>
   </p:embeddedFontLst>
   <p:defaultTextStyle>
@@ -823,7 +824,7 @@
   <p:cSld>
     <p:spTree>
       <p:nvGrpSpPr>
-        <p:cNvPr id="134" name="Shape 134"/>
+        <p:cNvPr id="135" name="Shape 135"/>
         <p:cNvGrpSpPr/>
         <p:nvPr/>
       </p:nvGrpSpPr>
@@ -837,7 +838,7 @@
       </p:grpSpPr>
       <p:sp>
         <p:nvSpPr>
-          <p:cNvPr id="135" name="Google Shape;135;g3d5933e7c9c_0_271:notes"/>
+          <p:cNvPr id="136" name="Google Shape;136;g3d5933e7c9c_0_266:notes"/>
           <p:cNvSpPr/>
           <p:nvPr>
             <p:ph idx="2" type="sldImg"/>
@@ -872,7 +873,106 @@
       </p:sp>
       <p:sp>
         <p:nvSpPr>
-          <p:cNvPr id="136" name="Google Shape;136;g3d5933e7c9c_0_271:notes"/>
+          <p:cNvPr id="137" name="Google Shape;137;g3d5933e7c9c_0_266:notes"/>
+          <p:cNvSpPr txBox="1"/>
+          <p:nvPr>
+            <p:ph idx="1" type="body"/>
+          </p:nvPr>
+        </p:nvSpPr>
+        <p:spPr>
+          <a:xfrm>
+            <a:off x="685800" y="4343400"/>
+            <a:ext cx="5486400" cy="4114800"/>
+          </a:xfrm>
+          <a:prstGeom prst="rect">
+            <a:avLst/>
+          </a:prstGeom>
+        </p:spPr>
+        <p:txBody>
+          <a:bodyPr anchorCtr="0" anchor="t" bIns="91425" lIns="91425" spcFirstLastPara="1" rIns="91425" wrap="square" tIns="91425">
+            <a:noAutofit/>
+          </a:bodyPr>
+          <a:lstStyle/>
+          <a:p>
+            <a:pPr indent="0" lvl="0" marL="0" rtl="0" algn="l">
+              <a:spcBef>
+                <a:spcPts val="0"/>
+              </a:spcBef>
+              <a:spcAft>
+                <a:spcPts val="0"/>
+              </a:spcAft>
+              <a:buNone/>
+            </a:pPr>
+            <a:r>
+              <a:t/>
+            </a:r>
+            <a:endParaRPr/>
+          </a:p>
+        </p:txBody>
+      </p:sp>
+    </p:spTree>
+  </p:cSld>
+  <p:clrMapOvr>
+    <a:masterClrMapping/>
+  </p:clrMapOvr>
+</p:notes>
+</file>
+
+<file path=ppt/notesSlides/notesSlide11.xml><?xml version="1.0" encoding="utf-8"?>
+<p:notes xmlns:a="http://schemas.openxmlformats.org/drawingml/2006/main" xmlns:r="http://schemas.openxmlformats.org/officeDocument/2006/relationships" xmlns:mc="http://schemas.openxmlformats.org/markup-compatibility/2006" xmlns:mv="urn:schemas-microsoft-com:mac:vml" xmlns:p="http://schemas.openxmlformats.org/presentationml/2006/main" xmlns:c="http://schemas.openxmlformats.org/drawingml/2006/chart" xmlns:dgm="http://schemas.openxmlformats.org/drawingml/2006/diagram" xmlns:o="urn:schemas-microsoft-com:office:office" xmlns:v="urn:schemas-microsoft-com:vml" xmlns:pvml="urn:schemas-microsoft-com:office:powerpoint" xmlns:com="http://schemas.openxmlformats.org/drawingml/2006/compatibility" xmlns:p14="http://schemas.microsoft.com/office/powerpoint/2010/main" xmlns:p15="http://schemas.microsoft.com/office/powerpoint/2012/main" xmlns:ahyp="http://schemas.microsoft.com/office/drawing/2018/hyperlinkcolor" showMasterPhAnim="0" showMasterSp="0">
+  <p:cSld>
+    <p:spTree>
+      <p:nvGrpSpPr>
+        <p:cNvPr id="140" name="Shape 140"/>
+        <p:cNvGrpSpPr/>
+        <p:nvPr/>
+      </p:nvGrpSpPr>
+      <p:grpSpPr>
+        <a:xfrm>
+          <a:off x="0" y="0"/>
+          <a:ext cx="0" cy="0"/>
+          <a:chOff x="0" y="0"/>
+          <a:chExt cx="0" cy="0"/>
+        </a:xfrm>
+      </p:grpSpPr>
+      <p:sp>
+        <p:nvSpPr>
+          <p:cNvPr id="141" name="Google Shape;141;g3d5933e7c9c_0_271:notes"/>
+          <p:cNvSpPr/>
+          <p:nvPr>
+            <p:ph idx="2" type="sldImg"/>
+          </p:nvPr>
+        </p:nvSpPr>
+        <p:spPr>
+          <a:xfrm>
+            <a:off x="381300" y="685800"/>
+            <a:ext cx="6096000" cy="3429000"/>
+          </a:xfrm>
+          <a:custGeom>
+            <a:rect b="b" l="l" r="r" t="t"/>
+            <a:pathLst>
+              <a:path extrusionOk="0" h="120000" w="120000">
+                <a:moveTo>
+                  <a:pt x="0" y="0"/>
+                </a:moveTo>
+                <a:lnTo>
+                  <a:pt x="120000" y="0"/>
+                </a:lnTo>
+                <a:lnTo>
+                  <a:pt x="120000" y="120000"/>
+                </a:lnTo>
+                <a:lnTo>
+                  <a:pt x="0" y="120000"/>
+                </a:lnTo>
+                <a:close/>
+              </a:path>
+            </a:pathLst>
+          </a:custGeom>
+        </p:spPr>
+      </p:sp>
+      <p:sp>
+        <p:nvSpPr>
+          <p:cNvPr id="142" name="Google Shape;142;g3d5933e7c9c_0_271:notes"/>
           <p:cNvSpPr txBox="1"/>
           <p:nvPr>
             <p:ph idx="1" type="body"/>
@@ -1035,7 +1135,7 @@
       </p:grpSpPr>
       <p:sp>
         <p:nvSpPr>
-          <p:cNvPr id="94" name="Google Shape;94;g3d5933e7c9c_0_240:notes"/>
+          <p:cNvPr id="94" name="Google Shape;94;g3d5933e7c9c_0_247:notes"/>
           <p:cNvSpPr/>
           <p:nvPr>
             <p:ph idx="2" type="sldImg"/>
@@ -1070,7 +1170,7 @@
       </p:sp>
       <p:sp>
         <p:nvSpPr>
-          <p:cNvPr id="95" name="Google Shape;95;g3d5933e7c9c_0_240:notes"/>
+          <p:cNvPr id="95" name="Google Shape;95;g3d5933e7c9c_0_247:notes"/>
           <p:cNvSpPr txBox="1"/>
           <p:nvPr>
             <p:ph idx="1" type="body"/>
@@ -1134,7 +1234,7 @@
       </p:grpSpPr>
       <p:sp>
         <p:nvSpPr>
-          <p:cNvPr id="100" name="Google Shape;100;g3d5933e7c9c_0_247:notes"/>
+          <p:cNvPr id="100" name="Google Shape;100;g3d5933e7c9c_0_240:notes"/>
           <p:cNvSpPr/>
           <p:nvPr>
             <p:ph idx="2" type="sldImg"/>
@@ -1169,7 +1269,7 @@
       </p:sp>
       <p:sp>
         <p:nvSpPr>
-          <p:cNvPr id="101" name="Google Shape;101;g3d5933e7c9c_0_247:notes"/>
+          <p:cNvPr id="101" name="Google Shape;101;g3d5933e7c9c_0_240:notes"/>
           <p:cNvSpPr txBox="1"/>
           <p:nvPr>
             <p:ph idx="1" type="body"/>
@@ -1530,7 +1630,7 @@
       </p:grpSpPr>
       <p:sp>
         <p:nvSpPr>
-          <p:cNvPr id="124" name="Google Shape;124;g3d5933e7c9c_0_260:notes"/>
+          <p:cNvPr id="124" name="Google Shape;124;g3d615b21798_0_1:notes"/>
           <p:cNvSpPr/>
           <p:nvPr>
             <p:ph idx="2" type="sldImg"/>
@@ -1565,7 +1665,7 @@
       </p:sp>
       <p:sp>
         <p:nvSpPr>
-          <p:cNvPr id="125" name="Google Shape;125;g3d5933e7c9c_0_260:notes"/>
+          <p:cNvPr id="125" name="Google Shape;125;g3d615b21798_0_1:notes"/>
           <p:cNvSpPr txBox="1"/>
           <p:nvPr>
             <p:ph idx="1" type="body"/>
@@ -1629,7 +1729,7 @@
       </p:grpSpPr>
       <p:sp>
         <p:nvSpPr>
-          <p:cNvPr id="130" name="Google Shape;130;g3d5933e7c9c_0_266:notes"/>
+          <p:cNvPr id="130" name="Google Shape;130;g3d5933e7c9c_0_260:notes"/>
           <p:cNvSpPr/>
           <p:nvPr>
             <p:ph idx="2" type="sldImg"/>
@@ -1664,7 +1764,7 @@
       </p:sp>
       <p:sp>
         <p:nvSpPr>
-          <p:cNvPr id="131" name="Google Shape;131;g3d5933e7c9c_0_266:notes"/>
+          <p:cNvPr id="131" name="Google Shape;131;g3d5933e7c9c_0_260:notes"/>
           <p:cNvSpPr txBox="1"/>
           <p:nvPr>
             <p:ph idx="1" type="body"/>
@@ -8445,7 +8545,7 @@
   <p:cSld>
     <p:spTree>
       <p:nvGrpSpPr>
-        <p:cNvPr id="137" name="Shape 137"/>
+        <p:cNvPr id="138" name="Shape 138"/>
         <p:cNvGrpSpPr/>
         <p:nvPr/>
       </p:nvGrpSpPr>
@@ -8459,7 +8559,82 @@
       </p:grpSpPr>
       <p:sp>
         <p:nvSpPr>
-          <p:cNvPr id="138" name="Google Shape;138;p22"/>
+          <p:cNvPr id="139" name="Google Shape;139;p22"/>
+          <p:cNvSpPr txBox="1"/>
+          <p:nvPr>
+            <p:ph type="title"/>
+          </p:nvPr>
+        </p:nvSpPr>
+        <p:spPr>
+          <a:xfrm>
+            <a:off x="311700" y="1256050"/>
+            <a:ext cx="8520600" cy="2030700"/>
+          </a:xfrm>
+          <a:prstGeom prst="rect">
+            <a:avLst/>
+          </a:prstGeom>
+        </p:spPr>
+        <p:txBody>
+          <a:bodyPr anchorCtr="0" anchor="b" bIns="91425" lIns="91425" spcFirstLastPara="1" rIns="91425" wrap="square" tIns="91425">
+            <a:normAutofit/>
+          </a:bodyPr>
+          <a:lstStyle/>
+          <a:p>
+            <a:pPr indent="0" lvl="0" marL="0" rtl="0" algn="ctr">
+              <a:spcBef>
+                <a:spcPts val="0"/>
+              </a:spcBef>
+              <a:spcAft>
+                <a:spcPts val="0"/>
+              </a:spcAft>
+              <a:buNone/>
+            </a:pPr>
+            <a:r>
+              <a:rPr b="1" lang="bg" sz="10000">
+                <a:latin typeface="Comfortaa"/>
+                <a:ea typeface="Comfortaa"/>
+                <a:cs typeface="Comfortaa"/>
+                <a:sym typeface="Comfortaa"/>
+              </a:rPr>
+              <a:t>Демо</a:t>
+            </a:r>
+            <a:endParaRPr b="1" sz="10000">
+              <a:latin typeface="Comfortaa"/>
+              <a:ea typeface="Comfortaa"/>
+              <a:cs typeface="Comfortaa"/>
+              <a:sym typeface="Comfortaa"/>
+            </a:endParaRPr>
+          </a:p>
+        </p:txBody>
+      </p:sp>
+    </p:spTree>
+  </p:cSld>
+  <p:clrMapOvr>
+    <a:masterClrMapping/>
+  </p:clrMapOvr>
+</p:sld>
+</file>
+
+<file path=ppt/slides/slide11.xml><?xml version="1.0" encoding="utf-8"?>
+<p:sld xmlns:a="http://schemas.openxmlformats.org/drawingml/2006/main" xmlns:r="http://schemas.openxmlformats.org/officeDocument/2006/relationships" xmlns:mc="http://schemas.openxmlformats.org/markup-compatibility/2006" xmlns:mv="urn:schemas-microsoft-com:mac:vml" xmlns:p="http://schemas.openxmlformats.org/presentationml/2006/main" xmlns:c="http://schemas.openxmlformats.org/drawingml/2006/chart" xmlns:dgm="http://schemas.openxmlformats.org/drawingml/2006/diagram" xmlns:o="urn:schemas-microsoft-com:office:office" xmlns:v="urn:schemas-microsoft-com:vml" xmlns:pvml="urn:schemas-microsoft-com:office:powerpoint" xmlns:com="http://schemas.openxmlformats.org/drawingml/2006/compatibility" xmlns:p14="http://schemas.microsoft.com/office/powerpoint/2010/main" xmlns:p15="http://schemas.microsoft.com/office/powerpoint/2012/main" xmlns:ahyp="http://schemas.microsoft.com/office/drawing/2018/hyperlinkcolor">
+  <p:cSld>
+    <p:spTree>
+      <p:nvGrpSpPr>
+        <p:cNvPr id="143" name="Shape 143"/>
+        <p:cNvGrpSpPr/>
+        <p:nvPr/>
+      </p:nvGrpSpPr>
+      <p:grpSpPr>
+        <a:xfrm>
+          <a:off x="0" y="0"/>
+          <a:ext cx="0" cy="0"/>
+          <a:chOff x="0" y="0"/>
+          <a:chExt cx="0" cy="0"/>
+        </a:xfrm>
+      </p:grpSpPr>
+      <p:sp>
+        <p:nvSpPr>
+          <p:cNvPr id="144" name="Google Shape;144;p23"/>
           <p:cNvSpPr txBox="1"/>
           <p:nvPr>
             <p:ph type="title"/>
@@ -8794,7 +8969,7 @@
                 <a:cs typeface="Comfortaa"/>
                 <a:sym typeface="Comfortaa"/>
               </a:rPr>
-              <a:t>Потребителски роли</a:t>
+              <a:t>Технологичен стек</a:t>
             </a:r>
             <a:endParaRPr b="1">
               <a:latin typeface="Comfortaa"/>
@@ -8824,11 +8999,14 @@
         </p:spPr>
         <p:txBody>
           <a:bodyPr anchorCtr="0" anchor="t" bIns="91425" lIns="91425" spcFirstLastPara="1" rIns="91425" wrap="square" tIns="91425">
-            <a:normAutofit/>
+            <a:normAutofit lnSpcReduction="10000"/>
           </a:bodyPr>
           <a:lstStyle/>
           <a:p>
             <a:pPr indent="0" lvl="0" marL="0" rtl="0" algn="l">
+              <a:lnSpc>
+                <a:spcPct val="150000"/>
+              </a:lnSpc>
               <a:spcBef>
                 <a:spcPts val="0"/>
               </a:spcBef>
@@ -8839,24 +9017,15 @@
             </a:pPr>
             <a:r>
               <a:rPr lang="bg">
+                <a:solidFill>
+                  <a:schemeClr val="accent6"/>
+                </a:solidFill>
                 <a:latin typeface="Comfortaa Medium"/>
                 <a:ea typeface="Comfortaa Medium"/>
                 <a:cs typeface="Comfortaa Medium"/>
                 <a:sym typeface="Comfortaa Medium"/>
               </a:rPr>
-              <a:t>Системата разделя функционалностите спрямо </a:t>
-            </a:r>
-            <a:r>
-              <a:rPr lang="bg">
-                <a:solidFill>
-                  <a:schemeClr val="accent4"/>
-                </a:solidFill>
-                <a:latin typeface="Comfortaa Medium"/>
-                <a:ea typeface="Comfortaa Medium"/>
-                <a:cs typeface="Comfortaa Medium"/>
-                <a:sym typeface="Comfortaa Medium"/>
-              </a:rPr>
-              <a:t>3</a:t>
+              <a:t>Бекенд </a:t>
             </a:r>
             <a:r>
               <a:rPr lang="bg">
@@ -8865,7 +9034,7 @@
                 <a:cs typeface="Comfortaa Medium"/>
                 <a:sym typeface="Comfortaa Medium"/>
               </a:rPr>
-              <a:t> типа потребители:</a:t>
+              <a:t>инфраструктура: </a:t>
             </a:r>
             <a:endParaRPr>
               <a:latin typeface="Comfortaa Medium"/>
@@ -8891,24 +9060,12 @@
             </a:pPr>
             <a:r>
               <a:rPr lang="bg">
-                <a:solidFill>
-                  <a:schemeClr val="accent4"/>
-                </a:solidFill>
                 <a:latin typeface="Comfortaa Medium"/>
                 <a:ea typeface="Comfortaa Medium"/>
                 <a:cs typeface="Comfortaa Medium"/>
                 <a:sym typeface="Comfortaa Medium"/>
               </a:rPr>
-              <a:t>Traveler</a:t>
-            </a:r>
-            <a:r>
-              <a:rPr lang="bg">
-                <a:latin typeface="Comfortaa Medium"/>
-                <a:ea typeface="Comfortaa Medium"/>
-                <a:cs typeface="Comfortaa Medium"/>
-                <a:sym typeface="Comfortaa Medium"/>
-              </a:rPr>
-              <a:t>: Разглежда дестинации, резервира дати и запазва любими турове. </a:t>
+              <a:t>Spring Boot (Java): REST API, Spring Security, Spring Data JPA. </a:t>
             </a:r>
             <a:endParaRPr>
               <a:latin typeface="Comfortaa Medium"/>
@@ -8934,24 +9091,12 @@
             </a:pPr>
             <a:r>
               <a:rPr lang="bg">
-                <a:solidFill>
-                  <a:schemeClr val="accent4"/>
-                </a:solidFill>
                 <a:latin typeface="Comfortaa Medium"/>
                 <a:ea typeface="Comfortaa Medium"/>
                 <a:cs typeface="Comfortaa Medium"/>
                 <a:sym typeface="Comfortaa Medium"/>
               </a:rPr>
-              <a:t>Guide</a:t>
-            </a:r>
-            <a:r>
-              <a:rPr lang="bg">
-                <a:latin typeface="Comfortaa Medium"/>
-                <a:ea typeface="Comfortaa Medium"/>
-                <a:cs typeface="Comfortaa Medium"/>
-                <a:sym typeface="Comfortaa Medium"/>
-              </a:rPr>
-              <a:t>: Създава, редактира и управлява своите турове. </a:t>
+              <a:t>База данни: PostgreSQL (стартирана чрез Docker). </a:t>
             </a:r>
             <a:endParaRPr>
               <a:latin typeface="Comfortaa Medium"/>
@@ -8977,15 +9122,44 @@
             </a:pPr>
             <a:r>
               <a:rPr lang="bg">
-                <a:solidFill>
-                  <a:schemeClr val="accent4"/>
-                </a:solidFill>
                 <a:latin typeface="Comfortaa Medium"/>
                 <a:ea typeface="Comfortaa Medium"/>
                 <a:cs typeface="Comfortaa Medium"/>
                 <a:sym typeface="Comfortaa Medium"/>
               </a:rPr>
-              <a:t>Admin</a:t>
+              <a:t>Документация и Тестване: Swagger (OpenAPI). </a:t>
+            </a:r>
+            <a:endParaRPr>
+              <a:latin typeface="Comfortaa Medium"/>
+              <a:ea typeface="Comfortaa Medium"/>
+              <a:cs typeface="Comfortaa Medium"/>
+              <a:sym typeface="Comfortaa Medium"/>
+            </a:endParaRPr>
+          </a:p>
+          <a:p>
+            <a:pPr indent="0" lvl="0" marL="0" rtl="0" algn="l">
+              <a:lnSpc>
+                <a:spcPct val="150000"/>
+              </a:lnSpc>
+              <a:spcBef>
+                <a:spcPts val="1200"/>
+              </a:spcBef>
+              <a:spcAft>
+                <a:spcPts val="0"/>
+              </a:spcAft>
+              <a:buNone/>
+            </a:pPr>
+            <a:r>
+              <a:rPr lang="bg">
+                <a:solidFill>
+                  <a:schemeClr val="accent5"/>
+                </a:solidFill>
+                <a:latin typeface="Comfortaa Medium"/>
+                <a:ea typeface="Comfortaa Medium"/>
+                <a:cs typeface="Comfortaa Medium"/>
+                <a:sym typeface="Comfortaa Medium"/>
+              </a:rPr>
+              <a:t>Фронтенд </a:t>
             </a:r>
             <a:r>
               <a:rPr lang="bg">
@@ -8994,7 +9168,69 @@
                 <a:cs typeface="Comfortaa Medium"/>
                 <a:sym typeface="Comfortaa Medium"/>
               </a:rPr>
-              <a:t>: Има достъп до специално табло за пълна модерация на потребители и изтриване на съдържание.</a:t>
+              <a:t>архитектура: </a:t>
+            </a:r>
+            <a:endParaRPr>
+              <a:latin typeface="Comfortaa Medium"/>
+              <a:ea typeface="Comfortaa Medium"/>
+              <a:cs typeface="Comfortaa Medium"/>
+              <a:sym typeface="Comfortaa Medium"/>
+            </a:endParaRPr>
+          </a:p>
+          <a:p>
+            <a:pPr indent="-342900" lvl="0" marL="457200" rtl="0" algn="l">
+              <a:lnSpc>
+                <a:spcPct val="150000"/>
+              </a:lnSpc>
+              <a:spcBef>
+                <a:spcPts val="1200"/>
+              </a:spcBef>
+              <a:spcAft>
+                <a:spcPts val="0"/>
+              </a:spcAft>
+              <a:buSzPts val="1800"/>
+              <a:buFont typeface="Comfortaa Medium"/>
+              <a:buChar char="-"/>
+            </a:pPr>
+            <a:r>
+              <a:rPr lang="bg">
+                <a:latin typeface="Comfortaa Medium"/>
+                <a:ea typeface="Comfortaa Medium"/>
+                <a:cs typeface="Comfortaa Medium"/>
+                <a:sym typeface="Comfortaa Medium"/>
+              </a:rPr>
+              <a:t>Vanilla JavaScript &amp; Fetch API (асинхронни заявки). </a:t>
+            </a:r>
+            <a:endParaRPr>
+              <a:latin typeface="Comfortaa Medium"/>
+              <a:ea typeface="Comfortaa Medium"/>
+              <a:cs typeface="Comfortaa Medium"/>
+              <a:sym typeface="Comfortaa Medium"/>
+            </a:endParaRPr>
+          </a:p>
+          <a:p>
+            <a:pPr indent="-342900" lvl="0" marL="457200" rtl="0" algn="l">
+              <a:lnSpc>
+                <a:spcPct val="150000"/>
+              </a:lnSpc>
+              <a:spcBef>
+                <a:spcPts val="0"/>
+              </a:spcBef>
+              <a:spcAft>
+                <a:spcPts val="0"/>
+              </a:spcAft>
+              <a:buSzPts val="1800"/>
+              <a:buFont typeface="Comfortaa Medium"/>
+              <a:buChar char="-"/>
+            </a:pPr>
+            <a:r>
+              <a:rPr lang="bg">
+                <a:latin typeface="Comfortaa Medium"/>
+                <a:ea typeface="Comfortaa Medium"/>
+                <a:cs typeface="Comfortaa Medium"/>
+                <a:sym typeface="Comfortaa Medium"/>
+              </a:rPr>
+              <a:t>HTML5 и CSS3 (Flexbox/Grid, променливи).</a:t>
             </a:r>
             <a:endParaRPr>
               <a:latin typeface="Comfortaa Medium"/>
@@ -9069,7 +9305,7 @@
                 <a:cs typeface="Comfortaa"/>
                 <a:sym typeface="Comfortaa"/>
               </a:rPr>
-              <a:t>Технологичен стек</a:t>
+              <a:t>Потребителски роли</a:t>
             </a:r>
             <a:endParaRPr b="1">
               <a:latin typeface="Comfortaa"/>
@@ -9099,14 +9335,11 @@
         </p:spPr>
         <p:txBody>
           <a:bodyPr anchorCtr="0" anchor="t" bIns="91425" lIns="91425" spcFirstLastPara="1" rIns="91425" wrap="square" tIns="91425">
-            <a:normAutofit lnSpcReduction="10000"/>
+            <a:normAutofit/>
           </a:bodyPr>
           <a:lstStyle/>
           <a:p>
             <a:pPr indent="0" lvl="0" marL="0" rtl="0" algn="l">
-              <a:lnSpc>
-                <a:spcPct val="150000"/>
-              </a:lnSpc>
               <a:spcBef>
                 <a:spcPts val="0"/>
               </a:spcBef>
@@ -9117,15 +9350,24 @@
             </a:pPr>
             <a:r>
               <a:rPr lang="bg">
-                <a:solidFill>
-                  <a:schemeClr val="accent6"/>
-                </a:solidFill>
                 <a:latin typeface="Comfortaa Medium"/>
                 <a:ea typeface="Comfortaa Medium"/>
                 <a:cs typeface="Comfortaa Medium"/>
                 <a:sym typeface="Comfortaa Medium"/>
               </a:rPr>
-              <a:t>Бекенд </a:t>
+              <a:t>Системата разделя функционалностите спрямо </a:t>
+            </a:r>
+            <a:r>
+              <a:rPr lang="bg">
+                <a:solidFill>
+                  <a:schemeClr val="accent4"/>
+                </a:solidFill>
+                <a:latin typeface="Comfortaa Medium"/>
+                <a:ea typeface="Comfortaa Medium"/>
+                <a:cs typeface="Comfortaa Medium"/>
+                <a:sym typeface="Comfortaa Medium"/>
+              </a:rPr>
+              <a:t>3</a:t>
             </a:r>
             <a:r>
               <a:rPr lang="bg">
@@ -9134,7 +9376,7 @@
                 <a:cs typeface="Comfortaa Medium"/>
                 <a:sym typeface="Comfortaa Medium"/>
               </a:rPr>
-              <a:t>инфраструктура: </a:t>
+              <a:t> типа потребители:</a:t>
             </a:r>
             <a:endParaRPr>
               <a:latin typeface="Comfortaa Medium"/>
@@ -9160,12 +9402,24 @@
             </a:pPr>
             <a:r>
               <a:rPr lang="bg">
+                <a:solidFill>
+                  <a:schemeClr val="accent4"/>
+                </a:solidFill>
                 <a:latin typeface="Comfortaa Medium"/>
                 <a:ea typeface="Comfortaa Medium"/>
                 <a:cs typeface="Comfortaa Medium"/>
                 <a:sym typeface="Comfortaa Medium"/>
               </a:rPr>
-              <a:t>Spring Boot (Java): REST API, Spring Security, Spring Data JPA. </a:t>
+              <a:t>Traveler</a:t>
+            </a:r>
+            <a:r>
+              <a:rPr lang="bg">
+                <a:latin typeface="Comfortaa Medium"/>
+                <a:ea typeface="Comfortaa Medium"/>
+                <a:cs typeface="Comfortaa Medium"/>
+                <a:sym typeface="Comfortaa Medium"/>
+              </a:rPr>
+              <a:t>: Разглежда дестинации, резервира дати и запазва любими турове. </a:t>
             </a:r>
             <a:endParaRPr>
               <a:latin typeface="Comfortaa Medium"/>
@@ -9191,12 +9445,24 @@
             </a:pPr>
             <a:r>
               <a:rPr lang="bg">
+                <a:solidFill>
+                  <a:schemeClr val="accent4"/>
+                </a:solidFill>
                 <a:latin typeface="Comfortaa Medium"/>
                 <a:ea typeface="Comfortaa Medium"/>
                 <a:cs typeface="Comfortaa Medium"/>
                 <a:sym typeface="Comfortaa Medium"/>
               </a:rPr>
-              <a:t>База данни: PostgreSQL (стартирана чрез Docker). </a:t>
+              <a:t>Guide</a:t>
+            </a:r>
+            <a:r>
+              <a:rPr lang="bg">
+                <a:latin typeface="Comfortaa Medium"/>
+                <a:ea typeface="Comfortaa Medium"/>
+                <a:cs typeface="Comfortaa Medium"/>
+                <a:sym typeface="Comfortaa Medium"/>
+              </a:rPr>
+              <a:t>: Създава, редактира и управлява своите турове. </a:t>
             </a:r>
             <a:endParaRPr>
               <a:latin typeface="Comfortaa Medium"/>
@@ -9222,44 +9488,15 @@
             </a:pPr>
             <a:r>
               <a:rPr lang="bg">
+                <a:solidFill>
+                  <a:schemeClr val="accent4"/>
+                </a:solidFill>
                 <a:latin typeface="Comfortaa Medium"/>
                 <a:ea typeface="Comfortaa Medium"/>
                 <a:cs typeface="Comfortaa Medium"/>
                 <a:sym typeface="Comfortaa Medium"/>
               </a:rPr>
-              <a:t>Документация и Тестване: Swagger (OpenAPI). </a:t>
-            </a:r>
-            <a:endParaRPr>
-              <a:latin typeface="Comfortaa Medium"/>
-              <a:ea typeface="Comfortaa Medium"/>
-              <a:cs typeface="Comfortaa Medium"/>
-              <a:sym typeface="Comfortaa Medium"/>
-            </a:endParaRPr>
-          </a:p>
-          <a:p>
-            <a:pPr indent="0" lvl="0" marL="0" rtl="0" algn="l">
-              <a:lnSpc>
-                <a:spcPct val="150000"/>
-              </a:lnSpc>
-              <a:spcBef>
-                <a:spcPts val="1200"/>
-              </a:spcBef>
-              <a:spcAft>
-                <a:spcPts val="0"/>
-              </a:spcAft>
-              <a:buNone/>
-            </a:pPr>
-            <a:r>
-              <a:rPr lang="bg">
-                <a:solidFill>
-                  <a:schemeClr val="accent5"/>
-                </a:solidFill>
-                <a:latin typeface="Comfortaa Medium"/>
-                <a:ea typeface="Comfortaa Medium"/>
-                <a:cs typeface="Comfortaa Medium"/>
-                <a:sym typeface="Comfortaa Medium"/>
-              </a:rPr>
-              <a:t>Фронтенд </a:t>
+              <a:t>Admin</a:t>
             </a:r>
             <a:r>
               <a:rPr lang="bg">
@@ -9268,69 +9505,7 @@
                 <a:cs typeface="Comfortaa Medium"/>
                 <a:sym typeface="Comfortaa Medium"/>
               </a:rPr>
-              <a:t>архитектура: </a:t>
-            </a:r>
-            <a:endParaRPr>
-              <a:latin typeface="Comfortaa Medium"/>
-              <a:ea typeface="Comfortaa Medium"/>
-              <a:cs typeface="Comfortaa Medium"/>
-              <a:sym typeface="Comfortaa Medium"/>
-            </a:endParaRPr>
-          </a:p>
-          <a:p>
-            <a:pPr indent="-342900" lvl="0" marL="457200" rtl="0" algn="l">
-              <a:lnSpc>
-                <a:spcPct val="150000"/>
-              </a:lnSpc>
-              <a:spcBef>
-                <a:spcPts val="1200"/>
-              </a:spcBef>
-              <a:spcAft>
-                <a:spcPts val="0"/>
-              </a:spcAft>
-              <a:buSzPts val="1800"/>
-              <a:buFont typeface="Comfortaa Medium"/>
-              <a:buChar char="-"/>
-            </a:pPr>
-            <a:r>
-              <a:rPr lang="bg">
-                <a:latin typeface="Comfortaa Medium"/>
-                <a:ea typeface="Comfortaa Medium"/>
-                <a:cs typeface="Comfortaa Medium"/>
-                <a:sym typeface="Comfortaa Medium"/>
-              </a:rPr>
-              <a:t>Vanilla JavaScript &amp; Fetch API (асинхронни заявки). </a:t>
-            </a:r>
-            <a:endParaRPr>
-              <a:latin typeface="Comfortaa Medium"/>
-              <a:ea typeface="Comfortaa Medium"/>
-              <a:cs typeface="Comfortaa Medium"/>
-              <a:sym typeface="Comfortaa Medium"/>
-            </a:endParaRPr>
-          </a:p>
-          <a:p>
-            <a:pPr indent="-342900" lvl="0" marL="457200" rtl="0" algn="l">
-              <a:lnSpc>
-                <a:spcPct val="150000"/>
-              </a:lnSpc>
-              <a:spcBef>
-                <a:spcPts val="0"/>
-              </a:spcBef>
-              <a:spcAft>
-                <a:spcPts val="0"/>
-              </a:spcAft>
-              <a:buSzPts val="1800"/>
-              <a:buFont typeface="Comfortaa Medium"/>
-              <a:buChar char="-"/>
-            </a:pPr>
-            <a:r>
-              <a:rPr lang="bg">
-                <a:latin typeface="Comfortaa Medium"/>
-                <a:ea typeface="Comfortaa Medium"/>
-                <a:cs typeface="Comfortaa Medium"/>
-                <a:sym typeface="Comfortaa Medium"/>
-              </a:rPr>
-              <a:t>HTML5 и CSS3 (Flexbox/Grid, променливи).</a:t>
+              <a:t>: Има достъп до специално табло за пълна модерация на потребители и изтриване на съдържание.</a:t>
             </a:r>
             <a:endParaRPr>
               <a:latin typeface="Comfortaa Medium"/>
@@ -9910,58 +10085,6 @@
                 <a:cs typeface="Comfortaa Medium"/>
                 <a:sym typeface="Comfortaa Medium"/>
               </a:rPr>
-              <a:t>: Релация между Tour и TourDetails (Всеки тур има точно един обект с допълнителни детайли).</a:t>
-            </a:r>
-            <a:endParaRPr>
-              <a:solidFill>
-                <a:srgbClr val="252526"/>
-              </a:solidFill>
-              <a:latin typeface="Comfortaa Medium"/>
-              <a:ea typeface="Comfortaa Medium"/>
-              <a:cs typeface="Comfortaa Medium"/>
-              <a:sym typeface="Comfortaa Medium"/>
-            </a:endParaRPr>
-          </a:p>
-          <a:p>
-            <a:pPr indent="-342900" lvl="0" marL="457200" rtl="0" algn="l">
-              <a:lnSpc>
-                <a:spcPct val="150000"/>
-              </a:lnSpc>
-              <a:spcBef>
-                <a:spcPts val="0"/>
-              </a:spcBef>
-              <a:spcAft>
-                <a:spcPts val="0"/>
-              </a:spcAft>
-              <a:buClr>
-                <a:srgbClr val="252526"/>
-              </a:buClr>
-              <a:buSzPts val="1800"/>
-              <a:buFont typeface="Comfortaa Medium"/>
-              <a:buChar char="-"/>
-            </a:pPr>
-            <a:r>
-              <a:rPr lang="bg">
-                <a:solidFill>
-                  <a:schemeClr val="accent4"/>
-                </a:solidFill>
-                <a:latin typeface="Comfortaa Medium"/>
-                <a:ea typeface="Comfortaa Medium"/>
-                <a:cs typeface="Comfortaa Medium"/>
-                <a:sym typeface="Comfortaa Medium"/>
-              </a:rPr>
-              <a:t>@OneToOne</a:t>
-            </a:r>
-            <a:r>
-              <a:rPr lang="bg">
-                <a:solidFill>
-                  <a:srgbClr val="252526"/>
-                </a:solidFill>
-                <a:latin typeface="Comfortaa Medium"/>
-                <a:ea typeface="Comfortaa Medium"/>
-                <a:cs typeface="Comfortaa Medium"/>
-                <a:sym typeface="Comfortaa Medium"/>
-              </a:rPr>
               <a:t>: Релация между Tour и TourImage (Всеки тур има точно една запазена снимка).</a:t>
             </a:r>
             <a:endParaRPr>
@@ -10040,7 +10163,7 @@
                 <a:cs typeface="Comfortaa"/>
                 <a:sym typeface="Comfortaa"/>
               </a:rPr>
-              <a:t>Тестване на системата</a:t>
+              <a:t>Сигурност и защита на данните</a:t>
             </a:r>
             <a:endParaRPr b="1">
               <a:latin typeface="Comfortaa"/>
@@ -10061,7 +10184,7 @@
         </p:nvSpPr>
         <p:spPr>
           <a:xfrm>
-            <a:off x="311700" y="1229875"/>
+            <a:off x="311700" y="1086275"/>
             <a:ext cx="8520600" cy="3339000"/>
           </a:xfrm>
           <a:prstGeom prst="rect">
@@ -10070,11 +10193,11 @@
         </p:spPr>
         <p:txBody>
           <a:bodyPr anchorCtr="0" anchor="t" bIns="91425" lIns="91425" spcFirstLastPara="1" rIns="91425" wrap="square" tIns="91425">
-            <a:normAutofit/>
+            <a:normAutofit fontScale="85000"/>
           </a:bodyPr>
           <a:lstStyle/>
           <a:p>
-            <a:pPr indent="-342900" lvl="0" marL="457200" rtl="0" algn="l">
+            <a:pPr indent="-325755" lvl="0" marL="457200" rtl="0" algn="l">
               <a:lnSpc>
                 <a:spcPct val="150000"/>
               </a:lnSpc>
@@ -10085,39 +10208,51 @@
                 <a:spcPts val="0"/>
               </a:spcAft>
               <a:buClr>
-                <a:srgbClr val="252526"/>
+                <a:srgbClr val="000000"/>
               </a:buClr>
-              <a:buSzPts val="1800"/>
+              <a:buSzPct val="100000"/>
               <a:buFont typeface="Comfortaa Medium"/>
               <a:buChar char="-"/>
             </a:pPr>
             <a:r>
               <a:rPr lang="bg">
                 <a:solidFill>
-                  <a:schemeClr val="accent6"/>
+                  <a:srgbClr val="000000"/>
                 </a:solidFill>
                 <a:latin typeface="Comfortaa Medium"/>
                 <a:ea typeface="Comfortaa Medium"/>
                 <a:cs typeface="Comfortaa Medium"/>
                 <a:sym typeface="Comfortaa Medium"/>
               </a:rPr>
-              <a:t>HTTP API Scripts</a:t>
+              <a:t>Механизъм със </a:t>
             </a:r>
             <a:r>
               <a:rPr lang="bg">
                 <a:solidFill>
-                  <a:srgbClr val="252526"/>
+                  <a:schemeClr val="accent4"/>
                 </a:solidFill>
                 <a:latin typeface="Comfortaa Medium"/>
                 <a:ea typeface="Comfortaa Medium"/>
                 <a:cs typeface="Comfortaa Medium"/>
                 <a:sym typeface="Comfortaa Medium"/>
               </a:rPr>
-              <a:t>: Директни файлове (api-tests.http) за тестване на заявките (GET, POST). </a:t>
+              <a:t>XSRF-TOKEN</a:t>
+            </a:r>
+            <a:r>
+              <a:rPr lang="bg">
+                <a:solidFill>
+                  <a:srgbClr val="000000"/>
+                </a:solidFill>
+                <a:latin typeface="Comfortaa Medium"/>
+                <a:ea typeface="Comfortaa Medium"/>
+                <a:cs typeface="Comfortaa Medium"/>
+                <a:sym typeface="Comfortaa Medium"/>
+              </a:rPr>
+              <a:t> за всяка променяща състоянието заявка (POST, PUT, DELETE).</a:t>
             </a:r>
             <a:endParaRPr>
               <a:solidFill>
-                <a:srgbClr val="252526"/>
+                <a:srgbClr val="000000"/>
               </a:solidFill>
               <a:latin typeface="Comfortaa Medium"/>
               <a:ea typeface="Comfortaa Medium"/>
@@ -10126,7 +10261,7 @@
             </a:endParaRPr>
           </a:p>
           <a:p>
-            <a:pPr indent="-342900" lvl="0" marL="457200" rtl="0" algn="l">
+            <a:pPr indent="-325755" lvl="0" marL="457200" rtl="0" algn="l">
               <a:lnSpc>
                 <a:spcPct val="150000"/>
               </a:lnSpc>
@@ -10137,39 +10272,303 @@
                 <a:spcPts val="0"/>
               </a:spcAft>
               <a:buClr>
-                <a:srgbClr val="252526"/>
+                <a:srgbClr val="000000"/>
               </a:buClr>
-              <a:buSzPts val="1800"/>
+              <a:buSzPct val="100000"/>
               <a:buFont typeface="Comfortaa Medium"/>
               <a:buChar char="-"/>
             </a:pPr>
             <a:r>
               <a:rPr lang="bg">
                 <a:solidFill>
-                  <a:schemeClr val="accent6"/>
+                  <a:srgbClr val="000000"/>
                 </a:solidFill>
                 <a:latin typeface="Comfortaa Medium"/>
                 <a:ea typeface="Comfortaa Medium"/>
                 <a:cs typeface="Comfortaa Medium"/>
                 <a:sym typeface="Comfortaa Medium"/>
               </a:rPr>
-              <a:t>Swagger UI</a:t>
+              <a:t>Автоматичен обмен на токени между сървъра и клиентския </a:t>
             </a:r>
             <a:r>
               <a:rPr lang="bg">
                 <a:solidFill>
-                  <a:srgbClr val="252526"/>
+                  <a:schemeClr val="accent4"/>
                 </a:solidFill>
                 <a:latin typeface="Comfortaa Medium"/>
                 <a:ea typeface="Comfortaa Medium"/>
                 <a:cs typeface="Comfortaa Medium"/>
                 <a:sym typeface="Comfortaa Medium"/>
               </a:rPr>
-              <a:t>: Графичен интерфейс за интерактивно разглеждане на endpoints.</a:t>
+              <a:t>JavaScript</a:t>
+            </a:r>
+            <a:r>
+              <a:rPr lang="bg">
+                <a:solidFill>
+                  <a:srgbClr val="000000"/>
+                </a:solidFill>
+                <a:latin typeface="Comfortaa Medium"/>
+                <a:ea typeface="Comfortaa Medium"/>
+                <a:cs typeface="Comfortaa Medium"/>
+                <a:sym typeface="Comfortaa Medium"/>
+              </a:rPr>
+              <a:t>.</a:t>
             </a:r>
             <a:endParaRPr>
               <a:solidFill>
-                <a:srgbClr val="252526"/>
+                <a:srgbClr val="000000"/>
+              </a:solidFill>
+              <a:latin typeface="Comfortaa Medium"/>
+              <a:ea typeface="Comfortaa Medium"/>
+              <a:cs typeface="Comfortaa Medium"/>
+              <a:sym typeface="Comfortaa Medium"/>
+            </a:endParaRPr>
+          </a:p>
+          <a:p>
+            <a:pPr indent="-325755" lvl="0" marL="457200" rtl="0" algn="l">
+              <a:lnSpc>
+                <a:spcPct val="150000"/>
+              </a:lnSpc>
+              <a:spcBef>
+                <a:spcPts val="0"/>
+              </a:spcBef>
+              <a:spcAft>
+                <a:spcPts val="0"/>
+              </a:spcAft>
+              <a:buClr>
+                <a:srgbClr val="000000"/>
+              </a:buClr>
+              <a:buSzPct val="100000"/>
+              <a:buFont typeface="Comfortaa Medium"/>
+              <a:buChar char="-"/>
+            </a:pPr>
+            <a:r>
+              <a:rPr lang="bg">
+                <a:solidFill>
+                  <a:srgbClr val="000000"/>
+                </a:solidFill>
+                <a:latin typeface="Comfortaa Medium"/>
+                <a:ea typeface="Comfortaa Medium"/>
+                <a:cs typeface="Comfortaa Medium"/>
+                <a:sym typeface="Comfortaa Medium"/>
+              </a:rPr>
+              <a:t>Използване на алгоритъм </a:t>
+            </a:r>
+            <a:r>
+              <a:rPr lang="bg">
+                <a:solidFill>
+                  <a:schemeClr val="accent4"/>
+                </a:solidFill>
+                <a:latin typeface="Comfortaa Medium"/>
+                <a:ea typeface="Comfortaa Medium"/>
+                <a:cs typeface="Comfortaa Medium"/>
+                <a:sym typeface="Comfortaa Medium"/>
+              </a:rPr>
+              <a:t>BCrypt </a:t>
+            </a:r>
+            <a:r>
+              <a:rPr lang="bg">
+                <a:solidFill>
+                  <a:srgbClr val="000000"/>
+                </a:solidFill>
+                <a:latin typeface="Comfortaa Medium"/>
+                <a:ea typeface="Comfortaa Medium"/>
+                <a:cs typeface="Comfortaa Medium"/>
+                <a:sym typeface="Comfortaa Medium"/>
+              </a:rPr>
+              <a:t>за сигурно съхранение на паролите в базата данни</a:t>
+            </a:r>
+            <a:endParaRPr>
+              <a:solidFill>
+                <a:srgbClr val="000000"/>
+              </a:solidFill>
+              <a:latin typeface="Comfortaa Medium"/>
+              <a:ea typeface="Comfortaa Medium"/>
+              <a:cs typeface="Comfortaa Medium"/>
+              <a:sym typeface="Comfortaa Medium"/>
+            </a:endParaRPr>
+          </a:p>
+          <a:p>
+            <a:pPr indent="-325755" lvl="0" marL="457200" rtl="0" algn="l">
+              <a:lnSpc>
+                <a:spcPct val="150000"/>
+              </a:lnSpc>
+              <a:spcBef>
+                <a:spcPts val="0"/>
+              </a:spcBef>
+              <a:spcAft>
+                <a:spcPts val="0"/>
+              </a:spcAft>
+              <a:buClr>
+                <a:srgbClr val="000000"/>
+              </a:buClr>
+              <a:buSzPct val="100000"/>
+              <a:buFont typeface="Comfortaa Medium"/>
+              <a:buChar char="-"/>
+            </a:pPr>
+            <a:r>
+              <a:rPr lang="bg">
+                <a:solidFill>
+                  <a:srgbClr val="000000"/>
+                </a:solidFill>
+                <a:latin typeface="Comfortaa Medium"/>
+                <a:ea typeface="Comfortaa Medium"/>
+                <a:cs typeface="Comfortaa Medium"/>
+                <a:sym typeface="Comfortaa Medium"/>
+              </a:rPr>
+              <a:t>Стриктна проверка на входните данни чрез DTO и анотации</a:t>
+            </a:r>
+            <a:r>
+              <a:rPr lang="bg">
+                <a:solidFill>
+                  <a:srgbClr val="000000"/>
+                </a:solidFill>
+                <a:latin typeface="Comfortaa Medium"/>
+                <a:ea typeface="Comfortaa Medium"/>
+                <a:cs typeface="Comfortaa Medium"/>
+                <a:sym typeface="Comfortaa Medium"/>
+              </a:rPr>
+              <a:t> (</a:t>
+            </a:r>
+            <a:r>
+              <a:rPr lang="bg">
+                <a:solidFill>
+                  <a:schemeClr val="accent4"/>
+                </a:solidFill>
+                <a:latin typeface="Comfortaa Medium"/>
+                <a:ea typeface="Comfortaa Medium"/>
+                <a:cs typeface="Comfortaa Medium"/>
+                <a:sym typeface="Comfortaa Medium"/>
+              </a:rPr>
+              <a:t>@NotBlank</a:t>
+            </a:r>
+            <a:r>
+              <a:rPr lang="bg">
+                <a:solidFill>
+                  <a:srgbClr val="000000"/>
+                </a:solidFill>
+                <a:latin typeface="Comfortaa Medium"/>
+                <a:ea typeface="Comfortaa Medium"/>
+                <a:cs typeface="Comfortaa Medium"/>
+                <a:sym typeface="Comfortaa Medium"/>
+              </a:rPr>
+              <a:t>, </a:t>
+            </a:r>
+            <a:r>
+              <a:rPr lang="bg">
+                <a:solidFill>
+                  <a:schemeClr val="accent4"/>
+                </a:solidFill>
+                <a:latin typeface="Comfortaa Medium"/>
+                <a:ea typeface="Comfortaa Medium"/>
+                <a:cs typeface="Comfortaa Medium"/>
+                <a:sym typeface="Comfortaa Medium"/>
+              </a:rPr>
+              <a:t>@Size</a:t>
+            </a:r>
+            <a:r>
+              <a:rPr lang="bg">
+                <a:solidFill>
+                  <a:srgbClr val="000000"/>
+                </a:solidFill>
+                <a:latin typeface="Comfortaa Medium"/>
+                <a:ea typeface="Comfortaa Medium"/>
+                <a:cs typeface="Comfortaa Medium"/>
+                <a:sym typeface="Comfortaa Medium"/>
+              </a:rPr>
+              <a:t>, </a:t>
+            </a:r>
+            <a:r>
+              <a:rPr lang="bg">
+                <a:solidFill>
+                  <a:schemeClr val="accent4"/>
+                </a:solidFill>
+                <a:latin typeface="Comfortaa Medium"/>
+                <a:ea typeface="Comfortaa Medium"/>
+                <a:cs typeface="Comfortaa Medium"/>
+                <a:sym typeface="Comfortaa Medium"/>
+              </a:rPr>
+              <a:t>@Min…</a:t>
+            </a:r>
+            <a:r>
+              <a:rPr lang="bg">
+                <a:solidFill>
+                  <a:srgbClr val="000000"/>
+                </a:solidFill>
+                <a:latin typeface="Comfortaa Medium"/>
+                <a:ea typeface="Comfortaa Medium"/>
+                <a:cs typeface="Comfortaa Medium"/>
+                <a:sym typeface="Comfortaa Medium"/>
+              </a:rPr>
+              <a:t>)</a:t>
+            </a:r>
+            <a:endParaRPr>
+              <a:solidFill>
+                <a:srgbClr val="000000"/>
+              </a:solidFill>
+              <a:latin typeface="Comfortaa Medium"/>
+              <a:ea typeface="Comfortaa Medium"/>
+              <a:cs typeface="Comfortaa Medium"/>
+              <a:sym typeface="Comfortaa Medium"/>
+            </a:endParaRPr>
+          </a:p>
+          <a:p>
+            <a:pPr indent="-325755" lvl="0" marL="457200" rtl="0" algn="l">
+              <a:lnSpc>
+                <a:spcPct val="150000"/>
+              </a:lnSpc>
+              <a:spcBef>
+                <a:spcPts val="0"/>
+              </a:spcBef>
+              <a:spcAft>
+                <a:spcPts val="0"/>
+              </a:spcAft>
+              <a:buClr>
+                <a:srgbClr val="000000"/>
+              </a:buClr>
+              <a:buSzPct val="100000"/>
+              <a:buFont typeface="Comfortaa Medium"/>
+              <a:buChar char="-"/>
+            </a:pPr>
+            <a:r>
+              <a:rPr lang="bg">
+                <a:solidFill>
+                  <a:srgbClr val="000000"/>
+                </a:solidFill>
+                <a:latin typeface="Comfortaa Medium"/>
+                <a:ea typeface="Comfortaa Medium"/>
+                <a:cs typeface="Comfortaa Medium"/>
+                <a:sym typeface="Comfortaa Medium"/>
+              </a:rPr>
+              <a:t>Използване на </a:t>
+            </a:r>
+            <a:r>
+              <a:rPr lang="bg">
+                <a:solidFill>
+                  <a:schemeClr val="accent4"/>
+                </a:solidFill>
+                <a:latin typeface="Comfortaa Medium"/>
+                <a:ea typeface="Comfortaa Medium"/>
+                <a:cs typeface="Comfortaa Medium"/>
+                <a:sym typeface="Comfortaa Medium"/>
+              </a:rPr>
+              <a:t>Enums </a:t>
+            </a:r>
+            <a:r>
+              <a:rPr lang="bg">
+                <a:solidFill>
+                  <a:srgbClr val="000000"/>
+                </a:solidFill>
+                <a:latin typeface="Comfortaa Medium"/>
+                <a:ea typeface="Comfortaa Medium"/>
+                <a:cs typeface="Comfortaa Medium"/>
+                <a:sym typeface="Comfortaa Medium"/>
+              </a:rPr>
+              <a:t>за статуси и роли, което предотвратява невалидни състояния в бизнес логиката.</a:t>
+            </a:r>
+            <a:endParaRPr>
+              <a:solidFill>
+                <a:srgbClr val="000000"/>
               </a:solidFill>
               <a:latin typeface="Comfortaa Medium"/>
               <a:ea typeface="Comfortaa Medium"/>
@@ -10214,20 +10613,20 @@
         </p:nvSpPr>
         <p:spPr>
           <a:xfrm>
-            <a:off x="311700" y="1256050"/>
-            <a:ext cx="8520600" cy="2030700"/>
+            <a:off x="311700" y="410000"/>
+            <a:ext cx="8520600" cy="607800"/>
           </a:xfrm>
           <a:prstGeom prst="rect">
             <a:avLst/>
           </a:prstGeom>
         </p:spPr>
         <p:txBody>
-          <a:bodyPr anchorCtr="0" anchor="b" bIns="91425" lIns="91425" spcFirstLastPara="1" rIns="91425" wrap="square" tIns="91425">
-            <a:normAutofit/>
+          <a:bodyPr anchorCtr="0" anchor="t" bIns="91425" lIns="91425" spcFirstLastPara="1" rIns="91425" wrap="square" tIns="91425">
+            <a:normAutofit fontScale="90000"/>
           </a:bodyPr>
           <a:lstStyle/>
           <a:p>
-            <a:pPr indent="0" lvl="0" marL="0" rtl="0" algn="ctr">
+            <a:pPr indent="0" lvl="0" marL="0" rtl="0" algn="l">
               <a:spcBef>
                 <a:spcPts val="0"/>
               </a:spcBef>
@@ -10237,19 +10636,147 @@
               <a:buNone/>
             </a:pPr>
             <a:r>
-              <a:rPr b="1" lang="bg" sz="10000">
+              <a:rPr b="1" lang="bg">
                 <a:latin typeface="Comfortaa"/>
                 <a:ea typeface="Comfortaa"/>
                 <a:cs typeface="Comfortaa"/>
                 <a:sym typeface="Comfortaa"/>
               </a:rPr>
-              <a:t>Демо</a:t>
+              <a:t>Тестване на системата</a:t>
             </a:r>
-            <a:endParaRPr b="1" sz="10000">
+            <a:endParaRPr b="1">
               <a:latin typeface="Comfortaa"/>
               <a:ea typeface="Comfortaa"/>
               <a:cs typeface="Comfortaa"/>
               <a:sym typeface="Comfortaa"/>
+            </a:endParaRPr>
+          </a:p>
+        </p:txBody>
+      </p:sp>
+      <p:sp>
+        <p:nvSpPr>
+          <p:cNvPr id="134" name="Google Shape;134;p21"/>
+          <p:cNvSpPr txBox="1"/>
+          <p:nvPr>
+            <p:ph idx="1" type="body"/>
+          </p:nvPr>
+        </p:nvSpPr>
+        <p:spPr>
+          <a:xfrm>
+            <a:off x="311700" y="1229875"/>
+            <a:ext cx="8520600" cy="3339000"/>
+          </a:xfrm>
+          <a:prstGeom prst="rect">
+            <a:avLst/>
+          </a:prstGeom>
+        </p:spPr>
+        <p:txBody>
+          <a:bodyPr anchorCtr="0" anchor="t" bIns="91425" lIns="91425" spcFirstLastPara="1" rIns="91425" wrap="square" tIns="91425">
+            <a:normAutofit/>
+          </a:bodyPr>
+          <a:lstStyle/>
+          <a:p>
+            <a:pPr indent="-342900" lvl="0" marL="457200" rtl="0" algn="l">
+              <a:lnSpc>
+                <a:spcPct val="150000"/>
+              </a:lnSpc>
+              <a:spcBef>
+                <a:spcPts val="0"/>
+              </a:spcBef>
+              <a:spcAft>
+                <a:spcPts val="0"/>
+              </a:spcAft>
+              <a:buClr>
+                <a:srgbClr val="252526"/>
+              </a:buClr>
+              <a:buSzPts val="1800"/>
+              <a:buFont typeface="Comfortaa Medium"/>
+              <a:buChar char="-"/>
+            </a:pPr>
+            <a:r>
+              <a:rPr lang="bg">
+                <a:solidFill>
+                  <a:schemeClr val="accent6"/>
+                </a:solidFill>
+                <a:latin typeface="Comfortaa Medium"/>
+                <a:ea typeface="Comfortaa Medium"/>
+                <a:cs typeface="Comfortaa Medium"/>
+                <a:sym typeface="Comfortaa Medium"/>
+              </a:rPr>
+              <a:t>HTTP API Scripts</a:t>
+            </a:r>
+            <a:r>
+              <a:rPr lang="bg">
+                <a:solidFill>
+                  <a:srgbClr val="252526"/>
+                </a:solidFill>
+                <a:latin typeface="Comfortaa Medium"/>
+                <a:ea typeface="Comfortaa Medium"/>
+                <a:cs typeface="Comfortaa Medium"/>
+                <a:sym typeface="Comfortaa Medium"/>
+              </a:rPr>
+              <a:t>: Директни файлове (api-tests.http) за тестване на заявките (GET, POST). </a:t>
+            </a:r>
+            <a:endParaRPr>
+              <a:solidFill>
+                <a:srgbClr val="252526"/>
+              </a:solidFill>
+              <a:latin typeface="Comfortaa Medium"/>
+              <a:ea typeface="Comfortaa Medium"/>
+              <a:cs typeface="Comfortaa Medium"/>
+              <a:sym typeface="Comfortaa Medium"/>
+            </a:endParaRPr>
+          </a:p>
+          <a:p>
+            <a:pPr indent="-342900" lvl="0" marL="457200" rtl="0" algn="l">
+              <a:lnSpc>
+                <a:spcPct val="150000"/>
+              </a:lnSpc>
+              <a:spcBef>
+                <a:spcPts val="0"/>
+              </a:spcBef>
+              <a:spcAft>
+                <a:spcPts val="0"/>
+              </a:spcAft>
+              <a:buClr>
+                <a:srgbClr val="252526"/>
+              </a:buClr>
+              <a:buSzPts val="1800"/>
+              <a:buFont typeface="Comfortaa Medium"/>
+              <a:buChar char="-"/>
+            </a:pPr>
+            <a:r>
+              <a:rPr lang="bg">
+                <a:solidFill>
+                  <a:schemeClr val="accent6"/>
+                </a:solidFill>
+                <a:latin typeface="Comfortaa Medium"/>
+                <a:ea typeface="Comfortaa Medium"/>
+                <a:cs typeface="Comfortaa Medium"/>
+                <a:sym typeface="Comfortaa Medium"/>
+              </a:rPr>
+              <a:t>Swagger UI</a:t>
+            </a:r>
+            <a:r>
+              <a:rPr lang="bg">
+                <a:solidFill>
+                  <a:srgbClr val="252526"/>
+                </a:solidFill>
+                <a:latin typeface="Comfortaa Medium"/>
+                <a:ea typeface="Comfortaa Medium"/>
+                <a:cs typeface="Comfortaa Medium"/>
+                <a:sym typeface="Comfortaa Medium"/>
+              </a:rPr>
+              <a:t>: Графичен интерфейс за интерактивно разглеждане на endpoints.</a:t>
+            </a:r>
+            <a:endParaRPr>
+              <a:solidFill>
+                <a:srgbClr val="252526"/>
+              </a:solidFill>
+              <a:latin typeface="Comfortaa Medium"/>
+              <a:ea typeface="Comfortaa Medium"/>
+              <a:cs typeface="Comfortaa Medium"/>
+              <a:sym typeface="Comfortaa Medium"/>
             </a:endParaRPr>
           </a:p>
         </p:txBody>
@@ -10263,6 +10790,285 @@
 </file>
 
 <file path=ppt/theme/theme1.xml><?xml version="1.0" encoding="utf-8"?>
+<a:theme xmlns:a="http://schemas.openxmlformats.org/drawingml/2006/main" xmlns:r="http://schemas.openxmlformats.org/officeDocument/2006/relationships" name="Geometric">
+  <a:themeElements>
+    <a:clrScheme name="Geometric">
+      <a:dk1>
+        <a:srgbClr val="2A3990"/>
+      </a:dk1>
+      <a:lt1>
+        <a:srgbClr val="FFFFFF"/>
+      </a:lt1>
+      <a:dk2>
+        <a:srgbClr val="434343"/>
+      </a:dk2>
+      <a:lt2>
+        <a:srgbClr val="999999"/>
+      </a:lt2>
+      <a:accent1>
+        <a:srgbClr val="212D74"/>
+      </a:accent1>
+      <a:accent2>
+        <a:srgbClr val="3949AB"/>
+      </a:accent2>
+      <a:accent3>
+        <a:srgbClr val="9C254D"/>
+      </a:accent3>
+      <a:accent4>
+        <a:srgbClr val="D23369"/>
+      </a:accent4>
+      <a:accent5>
+        <a:srgbClr val="F06292"/>
+      </a:accent5>
+      <a:accent6>
+        <a:srgbClr val="7890CD"/>
+      </a:accent6>
+      <a:hlink>
+        <a:srgbClr val="F06292"/>
+      </a:hlink>
+      <a:folHlink>
+        <a:srgbClr val="F06292"/>
+      </a:folHlink>
+    </a:clrScheme>
+    <a:fontScheme name="Office">
+      <a:majorFont>
+        <a:latin typeface="Arial"/>
+        <a:ea typeface=""/>
+        <a:cs typeface=""/>
+        <a:font script="Jpan" typeface="ＭＳ Ｐゴシック"/>
+        <a:font script="Hang" typeface="맑은 고딕"/>
+        <a:font script="Hans" typeface="宋体"/>
+        <a:font script="Hant" typeface="新細明體"/>
+        <a:font script="Arab" typeface="Times New Roman"/>
+        <a:font script="Hebr" typeface="Times New Roman"/>
+        <a:font script="Thai" typeface="Angsana New"/>
+        <a:font script="Ethi" typeface="Nyala"/>
+        <a:font script="Beng" typeface="Vrinda"/>
+        <a:font script="Gujr" typeface="Shruti"/>
+        <a:font script="Khmr" typeface="MoolBoran"/>
+        <a:font script="Knda" typeface="Tunga"/>
+        <a:font script="Guru" typeface="Raavi"/>
+        <a:font script="Cans" typeface="Euphemia"/>
+        <a:font script="Cher" typeface="Plantagenet Cherokee"/>
+        <a:font script="Yiii" typeface="Microsoft Yi Baiti"/>
+        <a:font script="Tibt" typeface="Microsoft Himalaya"/>
+        <a:font script="Thaa" typeface="MV Boli"/>
+        <a:font script="Deva" typeface="Mangal"/>
+        <a:font script="Telu" typeface="Gautami"/>
+        <a:font script="Taml" typeface="Latha"/>
+        <a:font script="Syrc" typeface="Estrangelo Edessa"/>
+        <a:font script="Orya" typeface="Kalinga"/>
+        <a:font script="Mlym" typeface="Kartika"/>
+        <a:font script="Laoo" typeface="DokChampa"/>
+        <a:font script="Sinh" typeface="Iskoola Pota"/>
+        <a:font script="Mong" typeface="Mongolian Baiti"/>
+        <a:font script="Viet" typeface="Times New Roman"/>
+        <a:font script="Uigh" typeface="Microsoft Uighur"/>
+        <a:font script="Geor" typeface="Sylfaen"/>
+      </a:majorFont>
+      <a:minorFont>
+        <a:latin typeface="Arial"/>
+        <a:ea typeface=""/>
+        <a:cs typeface=""/>
+        <a:font script="Jpan" typeface="ＭＳ Ｐゴシック"/>
+        <a:font script="Hang" typeface="맑은 고딕"/>
+        <a:font script="Hans" typeface="宋体"/>
+        <a:font script="Hant" typeface="新細明體"/>
+        <a:font script="Arab" typeface="Arial"/>
+        <a:font script="Hebr" typeface="Arial"/>
+        <a:font script="Thai" typeface="Cordia New"/>
+        <a:font script="Ethi" typeface="Nyala"/>
+        <a:font script="Beng" typeface="Vrinda"/>
+        <a:font script="Gujr" typeface="Shruti"/>
+        <a:font script="Khmr" typeface="DaunPenh"/>
+        <a:font script="Knda" typeface="Tunga"/>
+        <a:font script="Guru" typeface="Raavi"/>
+        <a:font script="Cans" typeface="Euphemia"/>
+        <a:font script="Cher" typeface="Plantagenet Cherokee"/>
+        <a:font script="Yiii" typeface="Microsoft Yi Baiti"/>
+        <a:font script="Tibt" typeface="Microsoft Himalaya"/>
+        <a:font script="Thaa" typeface="MV Boli"/>
+        <a:font script="Deva" typeface="Mangal"/>
+        <a:font script="Telu" typeface="Gautami"/>
+        <a:font script="Taml" typeface="Latha"/>
+        <a:font script="Syrc" typeface="Estrangelo Edessa"/>
+        <a:font script="Orya" typeface="Kalinga"/>
+        <a:font script="Mlym" typeface="Kartika"/>
+        <a:font script="Laoo" typeface="DokChampa"/>
+        <a:font script="Sinh" typeface="Iskoola Pota"/>
+        <a:font script="Mong" typeface="Mongolian Baiti"/>
+        <a:font script="Viet" typeface="Arial"/>
+        <a:font script="Uigh" typeface="Microsoft Uighur"/>
+        <a:font script="Geor" typeface="Sylfaen"/>
+      </a:minorFont>
+    </a:fontScheme>
+    <a:fmtScheme name="Office">
+      <a:fillStyleLst>
+        <a:solidFill>
+          <a:schemeClr val="phClr"/>
+        </a:solidFill>
+        <a:gradFill rotWithShape="1">
+          <a:gsLst>
+            <a:gs pos="0">
+              <a:schemeClr val="phClr">
+                <a:tint val="50000"/>
+                <a:satMod val="300000"/>
+              </a:schemeClr>
+            </a:gs>
+            <a:gs pos="35000">
+              <a:schemeClr val="phClr">
+                <a:tint val="37000"/>
+                <a:satMod val="300000"/>
+              </a:schemeClr>
+            </a:gs>
+            <a:gs pos="100000">
+              <a:schemeClr val="phClr">
+                <a:tint val="15000"/>
+                <a:satMod val="350000"/>
+              </a:schemeClr>
+            </a:gs>
+          </a:gsLst>
+          <a:lin ang="16200000" scaled="1"/>
+        </a:gradFill>
+        <a:gradFill rotWithShape="1">
+          <a:gsLst>
+            <a:gs pos="0">
+              <a:schemeClr val="phClr">
+                <a:tint val="100000"/>
+                <a:shade val="100000"/>
+                <a:satMod val="130000"/>
+              </a:schemeClr>
+            </a:gs>
+            <a:gs pos="100000">
+              <a:schemeClr val="phClr">
+                <a:tint val="50000"/>
+                <a:shade val="100000"/>
+                <a:satMod val="350000"/>
+              </a:schemeClr>
+            </a:gs>
+          </a:gsLst>
+          <a:lin ang="16200000" scaled="0"/>
+        </a:gradFill>
+      </a:fillStyleLst>
+      <a:lnStyleLst>
+        <a:ln w="9525" cap="flat" cmpd="sng" algn="ctr">
+          <a:solidFill>
+            <a:schemeClr val="phClr">
+              <a:shade val="95000"/>
+              <a:satMod val="105000"/>
+            </a:schemeClr>
+          </a:solidFill>
+          <a:prstDash val="solid"/>
+        </a:ln>
+        <a:ln w="25400" cap="flat" cmpd="sng" algn="ctr">
+          <a:solidFill>
+            <a:schemeClr val="phClr"/>
+          </a:solidFill>
+          <a:prstDash val="solid"/>
+        </a:ln>
+        <a:ln w="38100" cap="flat" cmpd="sng" algn="ctr">
+          <a:solidFill>
+            <a:schemeClr val="phClr"/>
+          </a:solidFill>
+          <a:prstDash val="solid"/>
+        </a:ln>
+      </a:lnStyleLst>
+      <a:effectStyleLst>
+        <a:effectStyle>
+          <a:effectLst>
+            <a:outerShdw blurRad="40000" dist="20000" dir="5400000" rotWithShape="0">
+              <a:srgbClr val="000000">
+                <a:alpha val="38000"/>
+              </a:srgbClr>
+            </a:outerShdw>
+          </a:effectLst>
+        </a:effectStyle>
+        <a:effectStyle>
+          <a:effectLst>
+            <a:outerShdw blurRad="40000" dist="23000" dir="5400000" rotWithShape="0">
+              <a:srgbClr val="000000">
+                <a:alpha val="35000"/>
+              </a:srgbClr>
+            </a:outerShdw>
+          </a:effectLst>
+        </a:effectStyle>
+        <a:effectStyle>
+          <a:effectLst>
+            <a:outerShdw blurRad="40000" dist="23000" dir="5400000" rotWithShape="0">
+              <a:srgbClr val="000000">
+                <a:alpha val="35000"/>
+              </a:srgbClr>
+            </a:outerShdw>
+          </a:effectLst>
+          <a:scene3d>
+            <a:camera prst="orthographicFront">
+              <a:rot lat="0" lon="0" rev="0"/>
+            </a:camera>
+            <a:lightRig rig="threePt" dir="t">
+              <a:rot lat="0" lon="0" rev="1200000"/>
+            </a:lightRig>
+          </a:scene3d>
+          <a:sp3d>
+            <a:bevelT w="63500" h="25400"/>
+          </a:sp3d>
+        </a:effectStyle>
+      </a:effectStyleLst>
+      <a:bgFillStyleLst>
+        <a:solidFill>
+          <a:schemeClr val="phClr"/>
+        </a:solidFill>
+        <a:gradFill rotWithShape="1">
+          <a:gsLst>
+            <a:gs pos="0">
+              <a:schemeClr val="phClr">
+                <a:tint val="40000"/>
+                <a:satMod val="350000"/>
+              </a:schemeClr>
+            </a:gs>
+            <a:gs pos="40000">
+              <a:schemeClr val="phClr">
+                <a:tint val="45000"/>
+                <a:shade val="99000"/>
+                <a:satMod val="350000"/>
+              </a:schemeClr>
+            </a:gs>
+            <a:gs pos="100000">
+              <a:schemeClr val="phClr">
+                <a:shade val="20000"/>
+                <a:satMod val="255000"/>
+              </a:schemeClr>
+            </a:gs>
+          </a:gsLst>
+          <a:path path="circle">
+            <a:fillToRect l="50000" t="-80000" r="50000" b="180000"/>
+          </a:path>
+        </a:gradFill>
+        <a:gradFill rotWithShape="1">
+          <a:gsLst>
+            <a:gs pos="0">
+              <a:schemeClr val="phClr">
+                <a:tint val="80000"/>
+                <a:satMod val="300000"/>
+              </a:schemeClr>
+            </a:gs>
+            <a:gs pos="100000">
+              <a:schemeClr val="phClr">
+                <a:shade val="30000"/>
+                <a:satMod val="200000"/>
+              </a:schemeClr>
+            </a:gs>
+          </a:gsLst>
+          <a:path path="circle">
+            <a:fillToRect l="50000" t="50000" r="50000" b="50000"/>
+          </a:path>
+        </a:gradFill>
+      </a:bgFillStyleLst>
+    </a:fmtScheme>
+  </a:themeElements>
+</a:theme>
+</file>
+
+<file path=ppt/theme/theme2.xml><?xml version="1.0" encoding="utf-8"?>
 <a:theme xmlns:a="http://schemas.openxmlformats.org/drawingml/2006/main" xmlns:r="http://schemas.openxmlformats.org/officeDocument/2006/relationships">
   <a:themeElements>
     <a:clrScheme name="Default">
@@ -10539,283 +11345,4 @@
     </a:fmtScheme>
   </a:themeElements>
 </a:theme>
-</file>
-
-<file path=ppt/theme/theme2.xml><?xml version="1.0" encoding="utf-8"?>
-<a:theme xmlns:a="http://schemas.openxmlformats.org/drawingml/2006/main" xmlns:r="http://schemas.openxmlformats.org/officeDocument/2006/relationships" name="Geometric">
-  <a:themeElements>
-    <a:clrScheme name="Geometric">
-      <a:dk1>
-        <a:srgbClr val="2A3990"/>
-      </a:dk1>
-      <a:lt1>
-        <a:srgbClr val="FFFFFF"/>
-      </a:lt1>
-      <a:dk2>
-        <a:srgbClr val="434343"/>
-      </a:dk2>
-      <a:lt2>
-        <a:srgbClr val="999999"/>
-      </a:lt2>
-      <a:accent1>
-        <a:srgbClr val="212D74"/>
-      </a:accent1>
-      <a:accent2>
-        <a:srgbClr val="3949AB"/>
-      </a:accent2>
-      <a:accent3>
-        <a:srgbClr val="9C254D"/>
-      </a:accent3>
-      <a:accent4>
-        <a:srgbClr val="D23369"/>
-      </a:accent4>
-      <a:accent5>
-        <a:srgbClr val="F06292"/>
-      </a:accent5>
-      <a:accent6>
-        <a:srgbClr val="7890CD"/>
-      </a:accent6>
-      <a:hlink>
-        <a:srgbClr val="F06292"/>
-      </a:hlink>
-      <a:folHlink>
-        <a:srgbClr val="F06292"/>
-      </a:folHlink>
-    </a:clrScheme>
-    <a:fontScheme name="Office">
-      <a:majorFont>
-        <a:latin typeface="Arial"/>
-        <a:ea typeface=""/>
-        <a:cs typeface=""/>
-        <a:font script="Jpan" typeface="ＭＳ Ｐゴシック"/>
-        <a:font script="Hang" typeface="맑은 고딕"/>
-        <a:font script="Hans" typeface="宋体"/>
-        <a:font script="Hant" typeface="新細明體"/>
-        <a:font script="Arab" typeface="Times New Roman"/>
-        <a:font script="Hebr" typeface="Times New Roman"/>
-        <a:font script="Thai" typeface="Angsana New"/>
-        <a:font script="Ethi" typeface="Nyala"/>
-        <a:font script="Beng" typeface="Vrinda"/>
-        <a:font script="Gujr" typeface="Shruti"/>
-        <a:font script="Khmr" typeface="MoolBoran"/>
-        <a:font script="Knda" typeface="Tunga"/>
-        <a:font script="Guru" typeface="Raavi"/>
-        <a:font script="Cans" typeface="Euphemia"/>
-        <a:font script="Cher" typeface="Plantagenet Cherokee"/>
-        <a:font script="Yiii" typeface="Microsoft Yi Baiti"/>
-        <a:font script="Tibt" typeface="Microsoft Himalaya"/>
-        <a:font script="Thaa" typeface="MV Boli"/>
-        <a:font script="Deva" typeface="Mangal"/>
-        <a:font script="Telu" typeface="Gautami"/>
-        <a:font script="Taml" typeface="Latha"/>
-        <a:font script="Syrc" typeface="Estrangelo Edessa"/>
-        <a:font script="Orya" typeface="Kalinga"/>
-        <a:font script="Mlym" typeface="Kartika"/>
-        <a:font script="Laoo" typeface="DokChampa"/>
-        <a:font script="Sinh" typeface="Iskoola Pota"/>
-        <a:font script="Mong" typeface="Mongolian Baiti"/>
-        <a:font script="Viet" typeface="Times New Roman"/>
-        <a:font script="Uigh" typeface="Microsoft Uighur"/>
-        <a:font script="Geor" typeface="Sylfaen"/>
-      </a:majorFont>
-      <a:minorFont>
-        <a:latin typeface="Arial"/>
-        <a:ea typeface=""/>
-        <a:cs typeface=""/>
-        <a:font script="Jpan" typeface="ＭＳ Ｐゴシック"/>
-        <a:font script="Hang" typeface="맑은 고딕"/>
-        <a:font script="Hans" typeface="宋体"/>
-        <a:font script="Hant" typeface="新細明體"/>
-        <a:font script="Arab" typeface="Arial"/>
-        <a:font script="Hebr" typeface="Arial"/>
-        <a:font script="Thai" typeface="Cordia New"/>
-        <a:font script="Ethi" typeface="Nyala"/>
-        <a:font script="Beng" typeface="Vrinda"/>
-        <a:font script="Gujr" typeface="Shruti"/>
-        <a:font script="Khmr" typeface="DaunPenh"/>
-        <a:font script="Knda" typeface="Tunga"/>
-        <a:font script="Guru" typeface="Raavi"/>
-        <a:font script="Cans" typeface="Euphemia"/>
-        <a:font script="Cher" typeface="Plantagenet Cherokee"/>
-        <a:font script="Yiii" typeface="Microsoft Yi Baiti"/>
-        <a:font script="Tibt" typeface="Microsoft Himalaya"/>
-        <a:font script="Thaa" typeface="MV Boli"/>
-        <a:font script="Deva" typeface="Mangal"/>
-        <a:font script="Telu" typeface="Gautami"/>
-        <a:font script="Taml" typeface="Latha"/>
-        <a:font script="Syrc" typeface="Estrangelo Edessa"/>
-        <a:font script="Orya" typeface="Kalinga"/>
-        <a:font script="Mlym" typeface="Kartika"/>
-        <a:font script="Laoo" typeface="DokChampa"/>
-        <a:font script="Sinh" typeface="Iskoola Pota"/>
-        <a:font script="Mong" typeface="Mongolian Baiti"/>
-        <a:font script="Viet" typeface="Arial"/>
-        <a:font script="Uigh" typeface="Microsoft Uighur"/>
-        <a:font script="Geor" typeface="Sylfaen"/>
-      </a:minorFont>
-    </a:fontScheme>
-    <a:fmtScheme name="Office">
-      <a:fillStyleLst>
-        <a:solidFill>
-          <a:schemeClr val="phClr"/>
-        </a:solidFill>
-        <a:gradFill rotWithShape="1">
-          <a:gsLst>
-            <a:gs pos="0">
-              <a:schemeClr val="phClr">
-                <a:tint val="50000"/>
-                <a:satMod val="300000"/>
-              </a:schemeClr>
-            </a:gs>
-            <a:gs pos="35000">
-              <a:schemeClr val="phClr">
-                <a:tint val="37000"/>
-                <a:satMod val="300000"/>
-              </a:schemeClr>
-            </a:gs>
-            <a:gs pos="100000">
-              <a:schemeClr val="phClr">
-                <a:tint val="15000"/>
-                <a:satMod val="350000"/>
-              </a:schemeClr>
-            </a:gs>
-          </a:gsLst>
-          <a:lin ang="16200000" scaled="1"/>
-        </a:gradFill>
-        <a:gradFill rotWithShape="1">
-          <a:gsLst>
-            <a:gs pos="0">
-              <a:schemeClr val="phClr">
-                <a:tint val="100000"/>
-                <a:shade val="100000"/>
-                <a:satMod val="130000"/>
-              </a:schemeClr>
-            </a:gs>
-            <a:gs pos="100000">
-              <a:schemeClr val="phClr">
-                <a:tint val="50000"/>
-                <a:shade val="100000"/>
-                <a:satMod val="350000"/>
-              </a:schemeClr>
-            </a:gs>
-          </a:gsLst>
-          <a:lin ang="16200000" scaled="0"/>
-        </a:gradFill>
-      </a:fillStyleLst>
-      <a:lnStyleLst>
-        <a:ln w="9525" cap="flat" cmpd="sng" algn="ctr">
-          <a:solidFill>
-            <a:schemeClr val="phClr">
-              <a:shade val="95000"/>
-              <a:satMod val="105000"/>
-            </a:schemeClr>
-          </a:solidFill>
-          <a:prstDash val="solid"/>
-        </a:ln>
-        <a:ln w="25400" cap="flat" cmpd="sng" algn="ctr">
-          <a:solidFill>
-            <a:schemeClr val="phClr"/>
-          </a:solidFill>
-          <a:prstDash val="solid"/>
-        </a:ln>
-        <a:ln w="38100" cap="flat" cmpd="sng" algn="ctr">
-          <a:solidFill>
-            <a:schemeClr val="phClr"/>
-          </a:solidFill>
-          <a:prstDash val="solid"/>
-        </a:ln>
-      </a:lnStyleLst>
-      <a:effectStyleLst>
-        <a:effectStyle>
-          <a:effectLst>
-            <a:outerShdw blurRad="40000" dist="20000" dir="5400000" rotWithShape="0">
-              <a:srgbClr val="000000">
-                <a:alpha val="38000"/>
-              </a:srgbClr>
-            </a:outerShdw>
-          </a:effectLst>
-        </a:effectStyle>
-        <a:effectStyle>
-          <a:effectLst>
-            <a:outerShdw blurRad="40000" dist="23000" dir="5400000" rotWithShape="0">
-              <a:srgbClr val="000000">
-                <a:alpha val="35000"/>
-              </a:srgbClr>
-            </a:outerShdw>
-          </a:effectLst>
-        </a:effectStyle>
-        <a:effectStyle>
-          <a:effectLst>
-            <a:outerShdw blurRad="40000" dist="23000" dir="5400000" rotWithShape="0">
-              <a:srgbClr val="000000">
-                <a:alpha val="35000"/>
-              </a:srgbClr>
-            </a:outerShdw>
-          </a:effectLst>
-          <a:scene3d>
-            <a:camera prst="orthographicFront">
-              <a:rot lat="0" lon="0" rev="0"/>
-            </a:camera>
-            <a:lightRig rig="threePt" dir="t">
-              <a:rot lat="0" lon="0" rev="1200000"/>
-            </a:lightRig>
-          </a:scene3d>
-          <a:sp3d>
-            <a:bevelT w="63500" h="25400"/>
-          </a:sp3d>
-        </a:effectStyle>
-      </a:effectStyleLst>
-      <a:bgFillStyleLst>
-        <a:solidFill>
-          <a:schemeClr val="phClr"/>
-        </a:solidFill>
-        <a:gradFill rotWithShape="1">
-          <a:gsLst>
-            <a:gs pos="0">
-              <a:schemeClr val="phClr">
-                <a:tint val="40000"/>
-                <a:satMod val="350000"/>
-              </a:schemeClr>
-            </a:gs>
-            <a:gs pos="40000">
-              <a:schemeClr val="phClr">
-                <a:tint val="45000"/>
-                <a:shade val="99000"/>
-                <a:satMod val="350000"/>
-              </a:schemeClr>
-            </a:gs>
-            <a:gs pos="100000">
-              <a:schemeClr val="phClr">
-                <a:shade val="20000"/>
-                <a:satMod val="255000"/>
-              </a:schemeClr>
-            </a:gs>
-          </a:gsLst>
-          <a:path path="circle">
-            <a:fillToRect l="50000" t="-80000" r="50000" b="180000"/>
-          </a:path>
-        </a:gradFill>
-        <a:gradFill rotWithShape="1">
-          <a:gsLst>
-            <a:gs pos="0">
-              <a:schemeClr val="phClr">
-                <a:tint val="80000"/>
-                <a:satMod val="300000"/>
-              </a:schemeClr>
-            </a:gs>
-            <a:gs pos="100000">
-              <a:schemeClr val="phClr">
-                <a:shade val="30000"/>
-                <a:satMod val="200000"/>
-              </a:schemeClr>
-            </a:gs>
-          </a:gsLst>
-          <a:path path="circle">
-            <a:fillToRect l="50000" t="50000" r="50000" b="50000"/>
-          </a:path>
-        </a:gradFill>
-      </a:bgFillStyleLst>
-    </a:fmtScheme>
-  </a:themeElements>
-</a:theme>
 </file>